--- a/exp/discrete_maps/map_tuning_report.pptx
+++ b/exp/discrete_maps/map_tuning_report.pptx
@@ -3881,24 +3881,6 @@
       </p:sp>
       <p:sp>
         <p:nvSpPr>
-          <p:cNvPr id="3" name="文本占位符 2"/>
-          <p:cNvSpPr>
-            <a:spLocks noGrp="1"/>
-          </p:cNvSpPr>
-          <p:nvPr>
-            <p:ph type="body" idx="1"/>
-          </p:nvPr>
-        </p:nvSpPr>
-        <p:spPr/>
-        <p:txBody>
-          <a:bodyPr/>
-          <a:p>
-            <a:endParaRPr lang="zh-CN" altLang="en-US"/>
-          </a:p>
-        </p:txBody>
-      </p:sp>
-      <p:sp>
-        <p:nvSpPr>
           <p:cNvPr id="4" name="文本框 3"/>
           <p:cNvSpPr txBox="1"/>
           <p:nvPr/>
@@ -4139,32 +4121,14 @@
       </p:sp>
       <p:sp>
         <p:nvSpPr>
-          <p:cNvPr id="3" name="文本占位符 2"/>
-          <p:cNvSpPr>
-            <a:spLocks noGrp="1"/>
-          </p:cNvSpPr>
-          <p:nvPr>
-            <p:ph type="body" idx="1"/>
-          </p:nvPr>
-        </p:nvSpPr>
-        <p:spPr/>
-        <p:txBody>
-          <a:bodyPr/>
-          <a:p>
-            <a:endParaRPr lang="zh-CN" altLang="en-US"/>
-          </a:p>
-        </p:txBody>
-      </p:sp>
-      <p:sp>
-        <p:nvSpPr>
           <p:cNvPr id="4" name="文本框 3"/>
           <p:cNvSpPr txBox="1"/>
           <p:nvPr/>
         </p:nvSpPr>
         <p:spPr>
           <a:xfrm>
-            <a:off x="508000" y="1143000"/>
-            <a:ext cx="10922000" cy="2245360"/>
+            <a:off x="374015" y="1113790"/>
+            <a:ext cx="7198995" cy="3569335"/>
           </a:xfrm>
           <a:prstGeom prst="rect">
             <a:avLst/>
@@ -4173,7 +4137,7 @@
         </p:spPr>
         <p:txBody>
           <a:bodyPr wrap="square" rtlCol="0" anchor="t">
-            <a:spAutoFit/>
+            <a:noAutofit/>
           </a:bodyPr>
           <a:p>
             <a:r>
@@ -4414,6 +4378,9 @@
         <p:txBody>
           <a:bodyPr/>
           <a:p>
+            <a:pPr marL="0" indent="0">
+              <a:buNone/>
+            </a:pPr>
             <a:endParaRPr lang="zh-CN" altLang="en-US"/>
           </a:p>
         </p:txBody>
@@ -4577,24 +4544,6 @@
           </a:p>
         </p:txBody>
       </p:sp>
-      <p:sp>
-        <p:nvSpPr>
-          <p:cNvPr id="3" name="文本占位符 2"/>
-          <p:cNvSpPr>
-            <a:spLocks noGrp="1"/>
-          </p:cNvSpPr>
-          <p:nvPr>
-            <p:ph type="body" idx="1"/>
-          </p:nvPr>
-        </p:nvSpPr>
-        <p:spPr/>
-        <p:txBody>
-          <a:bodyPr/>
-          <a:p>
-            <a:endParaRPr lang="zh-CN" altLang="en-US"/>
-          </a:p>
-        </p:txBody>
-      </p:sp>
       <p:pic>
         <p:nvPicPr>
           <p:cNvPr id="4" name="图片 3" descr="map_sweep_best_ce"/>
@@ -4611,8 +4560,8 @@
         </p:blipFill>
         <p:spPr>
           <a:xfrm>
-            <a:off x="508000" y="1270000"/>
-            <a:ext cx="5334000" cy="3810000"/>
+            <a:off x="217805" y="1537335"/>
+            <a:ext cx="3225800" cy="2304415"/>
           </a:xfrm>
           <a:prstGeom prst="rect">
             <a:avLst/>
@@ -4635,8 +4584,8 @@
         </p:blipFill>
         <p:spPr>
           <a:xfrm>
-            <a:off x="6223000" y="1270000"/>
-            <a:ext cx="5334000" cy="3810000"/>
+            <a:off x="4276725" y="1597660"/>
+            <a:ext cx="3223895" cy="2302510"/>
           </a:xfrm>
           <a:prstGeom prst="rect">
             <a:avLst/>
@@ -4691,32 +4640,14 @@
       </p:sp>
       <p:sp>
         <p:nvSpPr>
-          <p:cNvPr id="3" name="文本占位符 2"/>
-          <p:cNvSpPr>
-            <a:spLocks noGrp="1"/>
-          </p:cNvSpPr>
-          <p:nvPr>
-            <p:ph type="body" idx="1"/>
-          </p:nvPr>
-        </p:nvSpPr>
-        <p:spPr/>
-        <p:txBody>
-          <a:bodyPr/>
-          <a:p>
-            <a:endParaRPr lang="zh-CN" altLang="en-US"/>
-          </a:p>
-        </p:txBody>
-      </p:sp>
-      <p:sp>
-        <p:nvSpPr>
           <p:cNvPr id="4" name="文本框 3"/>
           <p:cNvSpPr txBox="1"/>
           <p:nvPr/>
         </p:nvSpPr>
         <p:spPr>
           <a:xfrm>
-            <a:off x="508000" y="1143000"/>
-            <a:ext cx="10922000" cy="1014730"/>
+            <a:off x="628650" y="1143000"/>
+            <a:ext cx="7583805" cy="3174365"/>
           </a:xfrm>
           <a:prstGeom prst="rect">
             <a:avLst/>
@@ -4725,7 +4656,7 @@
         </p:spPr>
         <p:txBody>
           <a:bodyPr wrap="square" rtlCol="0" anchor="t">
-            <a:spAutoFit/>
+            <a:noAutofit/>
           </a:bodyPr>
           <a:p>
             <a:r>
